--- a/HW8/6-Гиперссылки. Принципы навигации web-сайта.pptx
+++ b/HW8/6-Гиперссылки. Принципы навигации web-сайта.pptx
@@ -11592,7 +11592,7 @@
       </p:grpSpPr>
       <p:pic>
         <p:nvPicPr>
-          <p:cNvPr id="4" name="Рисунок 3" descr="логотип STEP ACADEMY (белый).png"/>
+          <p:cNvPr id="4" name="Рисунок 3" descr=""/>
           <p:cNvPicPr>
             <a:picLocks noChangeAspect="1"/>
           </p:cNvPicPr>
@@ -20455,7 +20455,7 @@
       </p:graphicFrame>
       <p:pic>
         <p:nvPicPr>
-          <p:cNvPr id="87043" name="Picture 3" descr="http://htmlbook.ru/files/images/css/css_cursor_crosshair.png"/>
+          <p:cNvPr id="87043" name="Picture 3" descr=""/>
           <p:cNvPicPr>
             <a:picLocks noChangeAspect="1" noChangeArrowheads="1"/>
           </p:cNvPicPr>
@@ -20481,7 +20481,7 @@
       </p:pic>
       <p:pic>
         <p:nvPicPr>
-          <p:cNvPr id="87044" name="Picture 4" descr="http://htmlbook.ru/files/images/css/css_cursor_help.png"/>
+          <p:cNvPr id="87044" name="Picture 4" descr=""/>
           <p:cNvPicPr>
             <a:picLocks noChangeAspect="1" noChangeArrowheads="1"/>
           </p:cNvPicPr>
@@ -20507,7 +20507,7 @@
       </p:pic>
       <p:pic>
         <p:nvPicPr>
-          <p:cNvPr id="87045" name="Picture 5" descr="http://htmlbook.ru/files/images/css/css_cursor_move.png"/>
+          <p:cNvPr id="87045" name="Picture 5" descr=""/>
           <p:cNvPicPr>
             <a:picLocks noChangeAspect="1" noChangeArrowheads="1"/>
           </p:cNvPicPr>
@@ -20533,7 +20533,7 @@
       </p:pic>
       <p:pic>
         <p:nvPicPr>
-          <p:cNvPr id="87046" name="Picture 6" descr="http://htmlbook.ru/files/images/css/css_cursor_pointer.png"/>
+          <p:cNvPr id="87046" name="Picture 6" descr=""/>
           <p:cNvPicPr>
             <a:picLocks noChangeAspect="1" noChangeArrowheads="1"/>
           </p:cNvPicPr>
@@ -20559,7 +20559,7 @@
       </p:pic>
       <p:pic>
         <p:nvPicPr>
-          <p:cNvPr id="87047" name="Picture 7" descr="http://htmlbook.ru/files/images/css/css_cursor_progress.png"/>
+          <p:cNvPr id="87047" name="Picture 7" descr=""/>
           <p:cNvPicPr>
             <a:picLocks noChangeAspect="1" noChangeArrowheads="1"/>
           </p:cNvPicPr>
@@ -20585,7 +20585,7 @@
       </p:pic>
       <p:pic>
         <p:nvPicPr>
-          <p:cNvPr id="87048" name="Picture 8" descr="http://htmlbook.ru/files/images/css/css_cursor_text.png"/>
+          <p:cNvPr id="87048" name="Picture 8" descr=""/>
           <p:cNvPicPr>
             <a:picLocks noChangeAspect="1" noChangeArrowheads="1"/>
           </p:cNvPicPr>
@@ -20611,7 +20611,7 @@
       </p:pic>
       <p:pic>
         <p:nvPicPr>
-          <p:cNvPr id="87049" name="Picture 9" descr="http://htmlbook.ru/files/images/css/css_cursor_wait.png"/>
+          <p:cNvPr id="87049" name="Picture 9" descr=""/>
           <p:cNvPicPr>
             <a:picLocks noChangeAspect="1" noChangeArrowheads="1"/>
           </p:cNvPicPr>
@@ -20637,7 +20637,7 @@
       </p:pic>
       <p:pic>
         <p:nvPicPr>
-          <p:cNvPr id="87050" name="Picture 10" descr="http://htmlbook.ru/files/images/css/css_cursor_nresize.png"/>
+          <p:cNvPr id="87050" name="Picture 10" descr=""/>
           <p:cNvPicPr>
             <a:picLocks noChangeAspect="1" noChangeArrowheads="1"/>
           </p:cNvPicPr>
@@ -20663,7 +20663,7 @@
       </p:pic>
       <p:pic>
         <p:nvPicPr>
-          <p:cNvPr id="87051" name="Picture 11" descr="http://htmlbook.ru/files/images/css/css_cursor_neresize.png"/>
+          <p:cNvPr id="87051" name="Picture 11" descr=""/>
           <p:cNvPicPr>
             <a:picLocks noChangeAspect="1" noChangeArrowheads="1"/>
           </p:cNvPicPr>
@@ -20689,7 +20689,7 @@
       </p:pic>
       <p:pic>
         <p:nvPicPr>
-          <p:cNvPr id="87052" name="Picture 12" descr="http://htmlbook.ru/files/images/css/css_cursor_eresize.png"/>
+          <p:cNvPr id="87052" name="Picture 12" descr=""/>
           <p:cNvPicPr>
             <a:picLocks noChangeAspect="1" noChangeArrowheads="1"/>
           </p:cNvPicPr>
@@ -20741,7 +20741,7 @@
       </p:pic>
       <p:pic>
         <p:nvPicPr>
-          <p:cNvPr id="87054" name="Picture 14" descr="http://htmlbook.ru/files/images/css/css_cursor_sresize.png"/>
+          <p:cNvPr id="87054" name="Picture 14" descr=""/>
           <p:cNvPicPr>
             <a:picLocks noChangeAspect="1" noChangeArrowheads="1"/>
           </p:cNvPicPr>
@@ -20767,7 +20767,7 @@
       </p:pic>
       <p:pic>
         <p:nvPicPr>
-          <p:cNvPr id="87055" name="Picture 15" descr="http://htmlbook.ru/files/images/css/css_cursor_swresize.png"/>
+          <p:cNvPr id="87055" name="Picture 15" descr=""/>
           <p:cNvPicPr>
             <a:picLocks noChangeAspect="1" noChangeArrowheads="1"/>
           </p:cNvPicPr>
@@ -20793,7 +20793,7 @@
       </p:pic>
       <p:pic>
         <p:nvPicPr>
-          <p:cNvPr id="87056" name="Picture 16" descr="http://htmlbook.ru/files/images/css/css_cursor_wresize.png"/>
+          <p:cNvPr id="87056" name="Picture 16" descr=""/>
           <p:cNvPicPr>
             <a:picLocks noChangeAspect="1" noChangeArrowheads="1"/>
           </p:cNvPicPr>
@@ -20819,7 +20819,7 @@
       </p:pic>
       <p:pic>
         <p:nvPicPr>
-          <p:cNvPr id="87057" name="Picture 17" descr="http://htmlbook.ru/files/images/css/css_cursor_nwresize.png"/>
+          <p:cNvPr id="87057" name="Picture 17" descr=""/>
           <p:cNvPicPr>
             <a:picLocks noChangeAspect="1" noChangeArrowheads="1"/>
           </p:cNvPicPr>
@@ -20845,7 +20845,7 @@
       </p:pic>
       <p:pic>
         <p:nvPicPr>
-          <p:cNvPr id="21" name="Picture 17" descr="http://htmlbook.ru/files/images/css/css_cursor_nwresize.png"/>
+          <p:cNvPr id="21" name="Picture 17" descr=""/>
           <p:cNvPicPr>
             <a:picLocks noChangeAspect="1" noChangeArrowheads="1"/>
           </p:cNvPicPr>

--- a/HW8/6-Гиперссылки. Принципы навигации web-сайта.pptx
+++ b/HW8/6-Гиперссылки. Принципы навигации web-сайта.pptx
@@ -11676,7 +11676,7 @@
                   </a:schemeClr>
                 </a:solidFill>
               </a:rPr>
-              <a:t>Зуев Александр</a:t>
+              <a:t/>
             </a:r>
             <a:endParaRPr lang="ru-RU" sz="3600" b="1" i="1" dirty="0">
               <a:ln w="50800"/>
